--- a/Shruti Gour Project Submission Template for EduentFoundation_IBMUniversityEngagement.pptx
+++ b/Shruti Gour Project Submission Template for EduentFoundation_IBMUniversityEngagement.pptx
@@ -259,7 +259,7 @@
       <p15:sldGuideLst xmlns:p15="http://schemas.microsoft.com/office/powerpoint/2012/main"/>
     </p:ext>
     <p:ext uri="GoogleSlidesCustomDataVersion2">
-      <go:slidesCustomData xmlns:go="http://customooxmlschemas.google.com/" xmlns:ahyp="http://schemas.microsoft.com/office/drawing/2018/hyperlinkcolor" xmlns:p15="http://schemas.microsoft.com/office/powerpoint/2012/main" xmlns:p14="http://schemas.microsoft.com/office/powerpoint/2010/main" xmlns:com="http://schemas.openxmlformats.org/drawingml/2006/compatibility" xmlns:pvml="urn:schemas-microsoft-com:office:powerpoint" xmlns:v="urn:schemas-microsoft-com:vml" xmlns:o="urn:schemas-microsoft-com:office:office" xmlns:dgm="http://schemas.openxmlformats.org/drawingml/2006/diagram" xmlns:c="http://schemas.openxmlformats.org/drawingml/2006/chart" xmlns:mv="urn:schemas-microsoft-com:mac:vml" xmlns:mc="http://schemas.openxmlformats.org/markup-compatibility/2006" xmlns="" r:id="rId27" roundtripDataSignature="AMtx7mjt3491jQ7aCoyIz2WXeHKroE7tpQ=="/>
+      <go:slidesCustomData xmlns="" xmlns:mc="http://schemas.openxmlformats.org/markup-compatibility/2006" xmlns:mv="urn:schemas-microsoft-com:mac:vml" xmlns:c="http://schemas.openxmlformats.org/drawingml/2006/chart" xmlns:dgm="http://schemas.openxmlformats.org/drawingml/2006/diagram" xmlns:o="urn:schemas-microsoft-com:office:office" xmlns:v="urn:schemas-microsoft-com:vml" xmlns:pvml="urn:schemas-microsoft-com:office:powerpoint" xmlns:com="http://schemas.openxmlformats.org/drawingml/2006/compatibility" xmlns:p14="http://schemas.microsoft.com/office/powerpoint/2010/main" xmlns:p15="http://schemas.microsoft.com/office/powerpoint/2012/main" xmlns:ahyp="http://schemas.microsoft.com/office/drawing/2018/hyperlinkcolor" xmlns:go="http://customooxmlschemas.google.com/" r:id="rId27" roundtripDataSignature="AMtx7mjt3491jQ7aCoyIz2WXeHKroE7tpQ=="/>
     </p:ext>
   </p:extLst>
 </p:presentation>
@@ -12667,14 +12667,7 @@
                 <a:latin typeface="Times New Roman" panose="02020603050405020304" pitchFamily="18" charset="0"/>
                 <a:cs typeface="Times New Roman" panose="02020603050405020304" pitchFamily="18" charset="0"/>
               </a:rPr>
-              <a:t>Problem Statement : </a:t>
-            </a:r>
-            <a:r>
-              <a:rPr lang="en-US" b="1" dirty="0">
-                <a:latin typeface="Times New Roman" panose="02020603050405020304" pitchFamily="18" charset="0"/>
-                <a:cs typeface="Times New Roman" panose="02020603050405020304" pitchFamily="18" charset="0"/>
-              </a:rPr>
-              <a:t>AI-Powered Smart Study Platform</a:t>
+              <a:t>Problem Statement : AI-Powered Smart Study Platform</a:t>
             </a:r>
           </a:p>
           <a:p>
@@ -13340,14 +13333,7 @@
                 <a:latin typeface="Times New Roman" panose="02020603050405020304" pitchFamily="18" charset="0"/>
                 <a:cs typeface="Times New Roman" panose="02020603050405020304" pitchFamily="18" charset="0"/>
               </a:rPr>
-              <a:t>IBM </a:t>
-            </a:r>
-            <a:r>
-              <a:rPr lang="en-US" b="1" dirty="0">
-                <a:latin typeface="Times New Roman" panose="02020603050405020304" pitchFamily="18" charset="0"/>
-                <a:cs typeface="Times New Roman" panose="02020603050405020304" pitchFamily="18" charset="0"/>
-              </a:rPr>
-              <a:t>Watsonx.ai </a:t>
+              <a:t>IBM Watsonx.ai </a:t>
             </a:r>
             <a:r>
               <a:rPr lang="en-US" dirty="0">
@@ -13761,10 +13747,6 @@
               </a:rPr>
               <a:t> to achieve goals—rather than just responding to prompts. In a smart study platform, it acts like an active “learning agent” that continuously supports and guides the student.</a:t>
             </a:r>
-            <a:endParaRPr lang="en-US" dirty="0">
-              <a:latin typeface="Times New Roman" panose="02020603050405020304" pitchFamily="18" charset="0"/>
-              <a:cs typeface="Times New Roman" panose="02020603050405020304" pitchFamily="18" charset="0"/>
-            </a:endParaRPr>
           </a:p>
         </p:txBody>
       </p:sp>
@@ -14144,77 +14126,14 @@
           </a:bodyPr>
           <a:lstStyle/>
           <a:p>
-            <a:pPr marL="0" marR="0" lvl="0" indent="0" algn="l" rtl="0">
+            <a:pPr lvl="0">
               <a:lnSpc>
                 <a:spcPct val="162162"/>
               </a:lnSpc>
-              <a:spcBef>
-                <a:spcPts val="0"/>
-              </a:spcBef>
-              <a:spcAft>
-                <a:spcPts val="0"/>
-              </a:spcAft>
               <a:buClr>
                 <a:srgbClr val="2B3541"/>
               </a:buClr>
               <a:buSzPts val="1850"/>
-              <a:buFont typeface="Times New Roman"/>
-              <a:buNone/>
-            </a:pPr>
-            <a:r>
-              <a:rPr lang="en-US" sz="1850" b="0" i="0" u="none" strike="noStrike" cap="none" dirty="0">
-                <a:solidFill>
-                  <a:srgbClr val="2B3541"/>
-                </a:solidFill>
-                <a:latin typeface="Times New Roman"/>
-                <a:ea typeface="Times New Roman"/>
-                <a:cs typeface="Times New Roman"/>
-                <a:sym typeface="Times New Roman"/>
-              </a:rPr>
-              <a:t>· Please create public </a:t>
-            </a:r>
-            <a:r>
-              <a:rPr lang="en-US" sz="1850" b="0" i="0" u="none" strike="noStrike" cap="none" dirty="0" err="1">
-                <a:solidFill>
-                  <a:srgbClr val="2B3541"/>
-                </a:solidFill>
-                <a:latin typeface="Times New Roman"/>
-                <a:ea typeface="Times New Roman"/>
-                <a:cs typeface="Times New Roman"/>
-                <a:sym typeface="Times New Roman"/>
-              </a:rPr>
-              <a:t>github</a:t>
-            </a:r>
-            <a:r>
-              <a:rPr lang="en-US" sz="1850" b="0" i="0" u="none" strike="noStrike" cap="none" dirty="0">
-                <a:solidFill>
-                  <a:srgbClr val="2B3541"/>
-                </a:solidFill>
-                <a:latin typeface="Times New Roman"/>
-                <a:ea typeface="Times New Roman"/>
-                <a:cs typeface="Times New Roman"/>
-                <a:sym typeface="Times New Roman"/>
-              </a:rPr>
-              <a:t> repository (Enable Add README  button while creating repository) with format – </a:t>
-            </a:r>
-          </a:p>
-          <a:p>
-            <a:pPr marL="0" marR="0" lvl="0" indent="0" algn="l" rtl="0">
-              <a:lnSpc>
-                <a:spcPct val="162162"/>
-              </a:lnSpc>
-              <a:spcBef>
-                <a:spcPts val="0"/>
-              </a:spcBef>
-              <a:spcAft>
-                <a:spcPts val="0"/>
-              </a:spcAft>
-              <a:buClr>
-                <a:srgbClr val="2B3541"/>
-              </a:buClr>
-              <a:buSzPts val="1850"/>
-              <a:buFont typeface="Times New Roman"/>
-              <a:buNone/>
             </a:pPr>
             <a:r>
               <a:rPr lang="en-US" sz="1850" dirty="0">
@@ -14226,32 +14145,17 @@
                 <a:cs typeface="Times New Roman"/>
                 <a:sym typeface="Times New Roman"/>
               </a:rPr>
-              <a:t>Please test and Paste the working  </a:t>
+              <a:t>https://github.com/mshrutir/AI-Powered-Smart-Study-Platform.git </a:t>
             </a:r>
-            <a:r>
-              <a:rPr lang="en-US" sz="1850" dirty="0" err="1">
-                <a:solidFill>
-                  <a:srgbClr val="2B3541"/>
-                </a:solidFill>
-                <a:latin typeface="Times New Roman"/>
-                <a:ea typeface="Times New Roman"/>
-                <a:cs typeface="Times New Roman"/>
-                <a:sym typeface="Times New Roman"/>
-              </a:rPr>
-              <a:t>Github</a:t>
-            </a:r>
-            <a:r>
-              <a:rPr lang="en-US" sz="1850" dirty="0">
-                <a:solidFill>
-                  <a:srgbClr val="2B3541"/>
-                </a:solidFill>
-                <a:latin typeface="Times New Roman"/>
-                <a:ea typeface="Times New Roman"/>
-                <a:cs typeface="Times New Roman"/>
-                <a:sym typeface="Times New Roman"/>
-              </a:rPr>
-              <a:t> URL –</a:t>
-            </a:r>
+            <a:endParaRPr lang="en-US" sz="1850" dirty="0" smtClean="0">
+              <a:solidFill>
+                <a:srgbClr val="2B3541"/>
+              </a:solidFill>
+              <a:latin typeface="Times New Roman"/>
+              <a:ea typeface="Times New Roman"/>
+              <a:cs typeface="Times New Roman"/>
+              <a:sym typeface="Times New Roman"/>
+            </a:endParaRPr>
           </a:p>
           <a:p>
             <a:pPr lvl="0">
@@ -14263,42 +14167,6 @@
               </a:buClr>
               <a:buSzPts val="1850"/>
             </a:pPr>
-            <a:r>
-              <a:rPr lang="en-US" sz="1850" b="1" dirty="0">
-                <a:solidFill>
-                  <a:srgbClr val="2B3541"/>
-                </a:solidFill>
-                <a:latin typeface="Times New Roman"/>
-                <a:ea typeface="Times New Roman"/>
-                <a:cs typeface="Times New Roman"/>
-                <a:sym typeface="Times New Roman"/>
-              </a:rPr>
-              <a:t>Make sure you have Uploaded following three files into your </a:t>
-            </a:r>
-            <a:r>
-              <a:rPr lang="en-US" sz="1850" b="1" dirty="0" err="1">
-                <a:solidFill>
-                  <a:srgbClr val="2B3541"/>
-                </a:solidFill>
-                <a:latin typeface="Times New Roman"/>
-                <a:ea typeface="Times New Roman"/>
-                <a:cs typeface="Times New Roman"/>
-                <a:sym typeface="Times New Roman"/>
-              </a:rPr>
-              <a:t>github</a:t>
-            </a:r>
-            <a:r>
-              <a:rPr lang="en-US" sz="1850" b="1" dirty="0">
-                <a:solidFill>
-                  <a:srgbClr val="2B3541"/>
-                </a:solidFill>
-                <a:latin typeface="Times New Roman"/>
-                <a:ea typeface="Times New Roman"/>
-                <a:cs typeface="Times New Roman"/>
-                <a:sym typeface="Times New Roman"/>
-              </a:rPr>
-              <a:t> repository  </a:t>
-            </a:r>
             <a:r>
               <a:rPr lang="en-US" sz="1850" dirty="0">
                 <a:solidFill>
@@ -14322,61 +14190,6 @@
                 <a:sym typeface="Times New Roman"/>
               </a:rPr>
             </a:br>
-            <a:r>
-              <a:rPr lang="en-US" sz="1850" dirty="0">
-                <a:solidFill>
-                  <a:srgbClr val="2B3541"/>
-                </a:solidFill>
-                <a:latin typeface="Times New Roman"/>
-                <a:ea typeface="Times New Roman"/>
-                <a:cs typeface="Times New Roman"/>
-                <a:sym typeface="Times New Roman"/>
-              </a:rPr>
-              <a:t>1) </a:t>
-            </a:r>
-            <a:r>
-              <a:rPr lang="en-US" sz="1850" dirty="0" err="1">
-                <a:solidFill>
-                  <a:srgbClr val="2B3541"/>
-                </a:solidFill>
-                <a:latin typeface="Times New Roman"/>
-                <a:ea typeface="Times New Roman"/>
-                <a:cs typeface="Times New Roman"/>
-                <a:sym typeface="Times New Roman"/>
-              </a:rPr>
-              <a:t>app.json</a:t>
-            </a:r>
-            <a:r>
-              <a:rPr lang="en-US" sz="1850" dirty="0">
-                <a:solidFill>
-                  <a:srgbClr val="2B3541"/>
-                </a:solidFill>
-                <a:latin typeface="Times New Roman"/>
-                <a:ea typeface="Times New Roman"/>
-                <a:cs typeface="Times New Roman"/>
-                <a:sym typeface="Times New Roman"/>
-              </a:rPr>
-              <a:t> file , 2) yourproblemstatement.pdf file  3) your projectpresntation.pptx file 4)any other files </a:t>
-            </a:r>
-          </a:p>
-          <a:p>
-            <a:pPr marL="0" marR="0" lvl="0" indent="0" algn="l" rtl="0">
-              <a:lnSpc>
-                <a:spcPct val="162162"/>
-              </a:lnSpc>
-              <a:spcBef>
-                <a:spcPts val="0"/>
-              </a:spcBef>
-              <a:spcAft>
-                <a:spcPts val="0"/>
-              </a:spcAft>
-              <a:buClr>
-                <a:srgbClr val="2B3541"/>
-              </a:buClr>
-              <a:buSzPts val="1850"/>
-              <a:buFont typeface="Times New Roman"/>
-              <a:buNone/>
-            </a:pPr>
             <a:endParaRPr sz="1850" b="0" i="0" u="none" strike="noStrike" cap="none" dirty="0">
               <a:solidFill>
                 <a:srgbClr val="000000"/>
